--- a/PPT/Python10-Polymorphism.pptx
+++ b/PPT/Python10-Polymorphism.pptx
@@ -6446,23 +6446,7 @@
                   <a:srgbClr val="000000"/>
                 </a:solidFill>
               </a:rPr>
-              <a:t> classes existent </a:t>
-            </a:r>
-            <a:r>
-              <a:rPr lang="en-US" altLang="fr-FR" sz="2400" dirty="0" err="1">
-                <a:solidFill>
-                  <a:srgbClr val="000000"/>
-                </a:solidFill>
-              </a:rPr>
-              <a:t>dans</a:t>
-            </a:r>
-            <a:r>
-              <a:rPr lang="en-US" altLang="fr-FR" sz="2400" dirty="0">
-                <a:solidFill>
-                  <a:srgbClr val="000000"/>
-                </a:solidFill>
-              </a:rPr>
-              <a:t> le </a:t>
+              <a:t> classes existent dans le </a:t>
             </a:r>
             <a:r>
               <a:rPr lang="en-US" altLang="fr-FR" sz="2400" dirty="0" err="1">
@@ -6489,27 +6473,20 @@
               <a:t>servir</a:t>
             </a:r>
             <a:r>
+              <a:rPr lang="en-US" altLang="fr-FR" sz="2400">
+                <a:solidFill>
+                  <a:srgbClr val="000000"/>
+                </a:solidFill>
+              </a:rPr>
+              <a:t> à </a:t>
+            </a:r>
+            <a:r>
               <a:rPr lang="en-US" altLang="fr-FR" sz="2400" dirty="0">
                 <a:solidFill>
                   <a:srgbClr val="000000"/>
                 </a:solidFill>
               </a:rPr>
-              <a:t> </a:t>
-            </a:r>
-            <a:br>
-              <a:rPr lang="en-US" altLang="fr-FR" sz="2400" dirty="0">
-                <a:solidFill>
-                  <a:srgbClr val="000000"/>
-                </a:solidFill>
-              </a:rPr>
-            </a:br>
-            <a:r>
-              <a:rPr lang="en-US" altLang="fr-FR" sz="2400" dirty="0">
-                <a:solidFill>
-                  <a:srgbClr val="000000"/>
-                </a:solidFill>
-              </a:rPr>
-              <a:t>à la </a:t>
+              <a:t>la </a:t>
             </a:r>
             <a:r>
               <a:rPr lang="en-US" altLang="fr-FR" sz="2400" dirty="0" err="1">
